--- a/docs/pptx/auc3/ritu-auc3-linsubhr-sens-death.pptx
+++ b/docs/pptx/auc3/ritu-auc3-linsubhr-sens-death.pptx
@@ -2443,7 +2443,7 @@
           </p:nvSpPr>
           <p:spPr>
             <a:xfrm>
-              <a:off x="1972656" y="2073503"/>
+              <a:off x="1971769" y="2073503"/>
               <a:ext cx="0" cy="3649639"/>
             </a:xfrm>
             <a:custGeom>
@@ -2486,7 +2486,7 @@
           </p:nvSpPr>
           <p:spPr>
             <a:xfrm>
-              <a:off x="4071747" y="2073503"/>
+              <a:off x="4066896" y="2073503"/>
               <a:ext cx="0" cy="3649639"/>
             </a:xfrm>
             <a:custGeom>
@@ -2529,7 +2529,7 @@
           </p:nvSpPr>
           <p:spPr>
             <a:xfrm>
-              <a:off x="6170837" y="2073503"/>
+              <a:off x="6162023" y="2073503"/>
               <a:ext cx="0" cy="3649639"/>
             </a:xfrm>
             <a:custGeom>
@@ -2572,7 +2572,7 @@
           </p:nvSpPr>
           <p:spPr>
             <a:xfrm>
-              <a:off x="8269927" y="2073503"/>
+              <a:off x="8257149" y="2073503"/>
               <a:ext cx="0" cy="3649639"/>
             </a:xfrm>
             <a:custGeom>
@@ -2830,7 +2830,7 @@
           </p:nvSpPr>
           <p:spPr>
             <a:xfrm>
-              <a:off x="923111" y="2073503"/>
+              <a:off x="924206" y="2073503"/>
               <a:ext cx="0" cy="3649639"/>
             </a:xfrm>
             <a:custGeom>
@@ -2873,7 +2873,7 @@
           </p:nvSpPr>
           <p:spPr>
             <a:xfrm>
-              <a:off x="3022201" y="2073503"/>
+              <a:off x="3019333" y="2073503"/>
               <a:ext cx="0" cy="3649639"/>
             </a:xfrm>
             <a:custGeom>
@@ -2916,7 +2916,7 @@
           </p:nvSpPr>
           <p:spPr>
             <a:xfrm>
-              <a:off x="5121292" y="2073503"/>
+              <a:off x="5114459" y="2073503"/>
               <a:ext cx="0" cy="3649639"/>
             </a:xfrm>
             <a:custGeom>
@@ -2959,7 +2959,7 @@
           </p:nvSpPr>
           <p:spPr>
             <a:xfrm>
-              <a:off x="7220382" y="2073503"/>
+              <a:off x="7209586" y="2073503"/>
               <a:ext cx="0" cy="3649639"/>
             </a:xfrm>
             <a:custGeom>
@@ -3045,7 +3045,7 @@
           </p:nvSpPr>
           <p:spPr>
             <a:xfrm>
-              <a:off x="4401933" y="2073503"/>
+              <a:off x="4423736" y="2073503"/>
               <a:ext cx="0" cy="3649639"/>
             </a:xfrm>
             <a:custGeom>
@@ -3088,7 +3088,7 @@
           </p:nvSpPr>
           <p:spPr>
             <a:xfrm>
-              <a:off x="3507589" y="2073503"/>
+              <a:off x="3470882" y="2073503"/>
               <a:ext cx="0" cy="3649639"/>
             </a:xfrm>
             <a:custGeom>
@@ -3131,7 +3131,7 @@
           </p:nvSpPr>
           <p:spPr>
             <a:xfrm>
-              <a:off x="5433405" y="2073503"/>
+              <a:off x="5437283" y="2073503"/>
               <a:ext cx="0" cy="3649639"/>
             </a:xfrm>
             <a:custGeom>
@@ -3404,7 +3404,7 @@
           </p:nvSpPr>
           <p:spPr>
             <a:xfrm>
-              <a:off x="842324" y="5785772"/>
+              <a:off x="843419" y="5785772"/>
               <a:ext cx="161574" cy="80101"/>
             </a:xfrm>
             <a:prstGeom prst="rect">
@@ -3450,7 +3450,7 @@
           </p:nvSpPr>
           <p:spPr>
             <a:xfrm>
-              <a:off x="2941414" y="5785772"/>
+              <a:off x="2938545" y="5785772"/>
               <a:ext cx="161574" cy="80101"/>
             </a:xfrm>
             <a:prstGeom prst="rect">
@@ -3496,7 +3496,7 @@
           </p:nvSpPr>
           <p:spPr>
             <a:xfrm>
-              <a:off x="5090202" y="5785772"/>
+              <a:off x="5083370" y="5785772"/>
               <a:ext cx="62179" cy="80101"/>
             </a:xfrm>
             <a:prstGeom prst="rect">
@@ -3542,7 +3542,7 @@
           </p:nvSpPr>
           <p:spPr>
             <a:xfrm>
-              <a:off x="7158203" y="5785772"/>
+              <a:off x="7147407" y="5785772"/>
               <a:ext cx="124358" cy="80101"/>
             </a:xfrm>
             <a:prstGeom prst="rect">
@@ -3713,7 +3713,7 @@
                   <a:latin typeface="Helvetica"/>
                   <a:cs typeface="Helvetica"/>
                 </a:rPr>
-                <a:t>HR per 10 % decline: NA (NA-NA), p_Bonf = NA (n = 6)  |  per IQR decline (Δ = 22.9 %): NA (NA-NA)  |  IQR: [-19.2, 3.7] %</a:t>
+                <a:t>HR per 10 % decline: NA (NA-NA), p_Bonf = NA (n = 6)  |  per IQR decline (Δ = 23.5 %): NA (NA-NA)  |  IQR: [-19.6, 3.9] %</a:t>
               </a:r>
             </a:p>
           </p:txBody>
